--- a/data-eng/decks/w2d5s2.pptx
+++ b/data-eng/decks/w2d5s2.pptx
@@ -3100,7 +3100,7 @@
       <p:grpSpPr/>
       <p:sp>
         <p:nvSpPr>
-          <p:cNvPr id="2" name="Oval 1"/>
+          <p:cNvPr id="2" name="deckgen:decor"/>
           <p:cNvSpPr/>
           <p:nvPr/>
         </p:nvSpPr>
@@ -3130,7 +3130,7 @@
       </p:sp>
       <p:sp>
         <p:nvSpPr>
-          <p:cNvPr id="3" name="Oval 2"/>
+          <p:cNvPr id="3" name="deckgen:decor"/>
           <p:cNvSpPr/>
           <p:nvPr/>
         </p:nvSpPr>
@@ -3160,7 +3160,7 @@
       </p:sp>
       <p:sp>
         <p:nvSpPr>
-          <p:cNvPr id="4" name="Oval 3"/>
+          <p:cNvPr id="4" name="deckgen:decor"/>
           <p:cNvSpPr/>
           <p:nvPr/>
         </p:nvSpPr>
@@ -3190,7 +3190,7 @@
       </p:sp>
       <p:sp>
         <p:nvSpPr>
-          <p:cNvPr id="5" name="Rectangle 4"/>
+          <p:cNvPr id="5" name="deckgen:decor"/>
           <p:cNvSpPr/>
           <p:nvPr/>
         </p:nvSpPr>
@@ -3220,7 +3220,7 @@
       </p:sp>
       <p:sp>
         <p:nvSpPr>
-          <p:cNvPr id="6" name="Oval 5"/>
+          <p:cNvPr id="6" name="deckgen:decor"/>
           <p:cNvSpPr/>
           <p:nvPr/>
         </p:nvSpPr>
@@ -3250,7 +3250,7 @@
       </p:sp>
       <p:sp>
         <p:nvSpPr>
-          <p:cNvPr id="7" name="Oval 6"/>
+          <p:cNvPr id="7" name="deckgen:decor"/>
           <p:cNvSpPr/>
           <p:nvPr/>
         </p:nvSpPr>
@@ -3280,7 +3280,7 @@
       </p:sp>
       <p:sp>
         <p:nvSpPr>
-          <p:cNvPr id="8" name="Oval 7"/>
+          <p:cNvPr id="8" name="deckgen:decor"/>
           <p:cNvSpPr/>
           <p:nvPr/>
         </p:nvSpPr>
@@ -3310,7 +3310,7 @@
       </p:sp>
       <p:sp>
         <p:nvSpPr>
-          <p:cNvPr id="9" name="Oval 8"/>
+          <p:cNvPr id="9" name="deckgen:decor"/>
           <p:cNvSpPr/>
           <p:nvPr/>
         </p:nvSpPr>
@@ -3340,7 +3340,7 @@
       </p:sp>
       <p:sp>
         <p:nvSpPr>
-          <p:cNvPr id="10" name="Rectangle 9"/>
+          <p:cNvPr id="10" name="deckgen:decor"/>
           <p:cNvSpPr/>
           <p:nvPr/>
         </p:nvSpPr>
@@ -3600,7 +3600,7 @@
       <p:grpSpPr/>
       <p:sp>
         <p:nvSpPr>
-          <p:cNvPr id="2" name="Oval 1"/>
+          <p:cNvPr id="2" name="deckgen:decor"/>
           <p:cNvSpPr/>
           <p:nvPr/>
         </p:nvSpPr>
@@ -3630,7 +3630,7 @@
       </p:sp>
       <p:sp>
         <p:nvSpPr>
-          <p:cNvPr id="3" name="Oval 2"/>
+          <p:cNvPr id="3" name="deckgen:decor"/>
           <p:cNvSpPr/>
           <p:nvPr/>
         </p:nvSpPr>
@@ -3660,7 +3660,7 @@
       </p:sp>
       <p:sp>
         <p:nvSpPr>
-          <p:cNvPr id="4" name="Oval 3"/>
+          <p:cNvPr id="4" name="deckgen:decor"/>
           <p:cNvSpPr/>
           <p:nvPr/>
         </p:nvSpPr>
@@ -4662,7 +4662,7 @@
       <p:grpSpPr/>
       <p:sp>
         <p:nvSpPr>
-          <p:cNvPr id="2" name="Oval 1"/>
+          <p:cNvPr id="2" name="deckgen:decor"/>
           <p:cNvSpPr/>
           <p:nvPr/>
         </p:nvSpPr>
@@ -4692,7 +4692,7 @@
       </p:sp>
       <p:sp>
         <p:nvSpPr>
-          <p:cNvPr id="3" name="Oval 2"/>
+          <p:cNvPr id="3" name="deckgen:decor"/>
           <p:cNvSpPr/>
           <p:nvPr/>
         </p:nvSpPr>
@@ -5469,7 +5469,7 @@
       <p:grpSpPr/>
       <p:sp>
         <p:nvSpPr>
-          <p:cNvPr id="2" name="Oval 1"/>
+          <p:cNvPr id="2" name="deckgen:decor"/>
           <p:cNvSpPr/>
           <p:nvPr/>
         </p:nvSpPr>
@@ -5499,7 +5499,7 @@
       </p:sp>
       <p:sp>
         <p:nvSpPr>
-          <p:cNvPr id="3" name="Oval 2"/>
+          <p:cNvPr id="3" name="deckgen:decor"/>
           <p:cNvSpPr/>
           <p:nvPr/>
         </p:nvSpPr>
@@ -5529,7 +5529,7 @@
       </p:sp>
       <p:sp>
         <p:nvSpPr>
-          <p:cNvPr id="4" name="Oval 3"/>
+          <p:cNvPr id="4" name="deckgen:decor"/>
           <p:cNvSpPr/>
           <p:nvPr/>
         </p:nvSpPr>
@@ -6460,7 +6460,7 @@
       <p:grpSpPr/>
       <p:sp>
         <p:nvSpPr>
-          <p:cNvPr id="2" name="Oval 1"/>
+          <p:cNvPr id="2" name="deckgen:decor"/>
           <p:cNvSpPr/>
           <p:nvPr/>
         </p:nvSpPr>
@@ -6490,7 +6490,7 @@
       </p:sp>
       <p:sp>
         <p:nvSpPr>
-          <p:cNvPr id="3" name="Oval 2"/>
+          <p:cNvPr id="3" name="deckgen:decor"/>
           <p:cNvSpPr/>
           <p:nvPr/>
         </p:nvSpPr>
@@ -6520,7 +6520,7 @@
       </p:sp>
       <p:sp>
         <p:nvSpPr>
-          <p:cNvPr id="4" name="Oval 3"/>
+          <p:cNvPr id="4" name="deckgen:decor"/>
           <p:cNvSpPr/>
           <p:nvPr/>
         </p:nvSpPr>
@@ -6696,7 +6696,7 @@
                 <a:ea typeface="Pretendard"/>
                 <a:cs typeface="Pretendard"/>
               </a:rPr>
-              <a:t>~/data-eng/week2 에서 2-3 의 가상환경을 켜고 시작합니다</a:t>
+              <a:t>실습점검을 마친 (.venv) 터미널에서 — 파일은 전부 ~/data-eng/week2 에 저장합니다</a:t>
             </a:r>
           </a:p>
         </p:txBody>
@@ -7635,7 +7635,7 @@
       <p:grpSpPr/>
       <p:sp>
         <p:nvSpPr>
-          <p:cNvPr id="2" name="Oval 1"/>
+          <p:cNvPr id="2" name="deckgen:decor"/>
           <p:cNvSpPr/>
           <p:nvPr/>
         </p:nvSpPr>
@@ -7665,7 +7665,7 @@
       </p:sp>
       <p:sp>
         <p:nvSpPr>
-          <p:cNvPr id="3" name="Oval 2"/>
+          <p:cNvPr id="3" name="deckgen:decor"/>
           <p:cNvSpPr/>
           <p:nvPr/>
         </p:nvSpPr>
@@ -7695,7 +7695,7 @@
       </p:sp>
       <p:sp>
         <p:nvSpPr>
-          <p:cNvPr id="4" name="Oval 3"/>
+          <p:cNvPr id="4" name="deckgen:decor"/>
           <p:cNvSpPr/>
           <p:nvPr/>
         </p:nvSpPr>
@@ -7844,7 +7844,7 @@
         <p:spPr>
           <a:xfrm>
             <a:off x="1143000" y="2781300"/>
-            <a:ext cx="1133142" cy="571500"/>
+            <a:ext cx="1185827" cy="571500"/>
           </a:xfrm>
           <a:prstGeom prst="rect">
             <a:avLst/>
@@ -7874,7 +7874,7 @@
         <p:spPr>
           <a:xfrm>
             <a:off x="1143000" y="2781300"/>
-            <a:ext cx="1133142" cy="571500"/>
+            <a:ext cx="1185827" cy="571500"/>
           </a:xfrm>
           <a:prstGeom prst="rect">
             <a:avLst/>
@@ -7914,8 +7914,8 @@
         </p:nvSpPr>
         <p:spPr>
           <a:xfrm>
-            <a:off x="2276142" y="2781300"/>
-            <a:ext cx="14868858" cy="571500"/>
+            <a:off x="2328827" y="2781300"/>
+            <a:ext cx="14816173" cy="571500"/>
           </a:xfrm>
           <a:prstGeom prst="rect">
             <a:avLst/>
@@ -7946,8 +7946,8 @@
         </p:nvSpPr>
         <p:spPr>
           <a:xfrm>
-            <a:off x="2428542" y="2781300"/>
-            <a:ext cx="14564058" cy="571500"/>
+            <a:off x="2481227" y="2781300"/>
+            <a:ext cx="14511373" cy="571500"/>
           </a:xfrm>
           <a:prstGeom prst="rect">
             <a:avLst/>
@@ -7974,7 +7974,7 @@
                 <a:ea typeface="Pretendard"/>
                 <a:cs typeface="Pretendard"/>
               </a:rPr>
-              <a:t>source .venv/bin/activate</a:t>
+              <a:t>source .venv/bin/activate — OS 셋 같다</a:t>
             </a:r>
           </a:p>
         </p:txBody>
@@ -7988,7 +7988,7 @@
         <p:spPr>
           <a:xfrm>
             <a:off x="1143000" y="3429000"/>
-            <a:ext cx="1133142" cy="571500"/>
+            <a:ext cx="1185827" cy="571500"/>
           </a:xfrm>
           <a:prstGeom prst="rect">
             <a:avLst/>
@@ -8018,7 +8018,7 @@
         <p:spPr>
           <a:xfrm>
             <a:off x="1143000" y="3429000"/>
-            <a:ext cx="1133142" cy="571500"/>
+            <a:ext cx="1185827" cy="571500"/>
           </a:xfrm>
           <a:prstGeom prst="rect">
             <a:avLst/>
@@ -8058,8 +8058,8 @@
         </p:nvSpPr>
         <p:spPr>
           <a:xfrm>
-            <a:off x="2276142" y="3429000"/>
-            <a:ext cx="14868858" cy="571500"/>
+            <a:off x="2328827" y="3429000"/>
+            <a:ext cx="14816173" cy="571500"/>
           </a:xfrm>
           <a:prstGeom prst="rect">
             <a:avLst/>
@@ -8090,8 +8090,8 @@
         </p:nvSpPr>
         <p:spPr>
           <a:xfrm>
-            <a:off x="2428542" y="3429000"/>
-            <a:ext cx="14564058" cy="571500"/>
+            <a:off x="2481227" y="3429000"/>
+            <a:ext cx="14511373" cy="571500"/>
           </a:xfrm>
           <a:prstGeom prst="rect">
             <a:avLst/>
@@ -8118,7 +8118,7 @@
                 <a:ea typeface="Pretendard"/>
                 <a:cs typeface="Pretendard"/>
               </a:rPr>
-              <a:t>pip install requests beautifulsoup4 pymysql</a:t>
+              <a:t>pip install requests beautifulsoup4 pymysql (점검에서 했으면 건너뜀)</a:t>
             </a:r>
           </a:p>
         </p:txBody>
@@ -8132,7 +8132,7 @@
         <p:spPr>
           <a:xfrm>
             <a:off x="1143000" y="4076700"/>
-            <a:ext cx="1133142" cy="571500"/>
+            <a:ext cx="1185827" cy="571500"/>
           </a:xfrm>
           <a:prstGeom prst="rect">
             <a:avLst/>
@@ -8162,7 +8162,7 @@
         <p:spPr>
           <a:xfrm>
             <a:off x="1143000" y="4076700"/>
-            <a:ext cx="1133142" cy="571500"/>
+            <a:ext cx="1185827" cy="571500"/>
           </a:xfrm>
           <a:prstGeom prst="rect">
             <a:avLst/>
@@ -8202,8 +8202,8 @@
         </p:nvSpPr>
         <p:spPr>
           <a:xfrm>
-            <a:off x="2276142" y="4076700"/>
-            <a:ext cx="14868858" cy="571500"/>
+            <a:off x="2328827" y="4076700"/>
+            <a:ext cx="14816173" cy="571500"/>
           </a:xfrm>
           <a:prstGeom prst="rect">
             <a:avLst/>
@@ -8234,8 +8234,8 @@
         </p:nvSpPr>
         <p:spPr>
           <a:xfrm>
-            <a:off x="2428542" y="4076700"/>
-            <a:ext cx="14564058" cy="571500"/>
+            <a:off x="2481227" y="4076700"/>
+            <a:ext cx="14511373" cy="571500"/>
           </a:xfrm>
           <a:prstGeom prst="rect">
             <a:avLst/>
@@ -8276,7 +8276,7 @@
         <p:spPr>
           <a:xfrm>
             <a:off x="1143000" y="4724400"/>
-            <a:ext cx="1133142" cy="571500"/>
+            <a:ext cx="1185827" cy="571500"/>
           </a:xfrm>
           <a:prstGeom prst="rect">
             <a:avLst/>
@@ -8306,7 +8306,7 @@
         <p:spPr>
           <a:xfrm>
             <a:off x="1143000" y="4724400"/>
-            <a:ext cx="1133142" cy="571500"/>
+            <a:ext cx="1185827" cy="571500"/>
           </a:xfrm>
           <a:prstGeom prst="rect">
             <a:avLst/>
@@ -8346,8 +8346,8 @@
         </p:nvSpPr>
         <p:spPr>
           <a:xfrm>
-            <a:off x="2276142" y="4724400"/>
-            <a:ext cx="14868858" cy="571500"/>
+            <a:off x="2328827" y="4724400"/>
+            <a:ext cx="14816173" cy="571500"/>
           </a:xfrm>
           <a:prstGeom prst="rect">
             <a:avLst/>
@@ -8378,8 +8378,8 @@
         </p:nvSpPr>
         <p:spPr>
           <a:xfrm>
-            <a:off x="2428542" y="4724400"/>
-            <a:ext cx="14564058" cy="571500"/>
+            <a:off x="2481227" y="4724400"/>
+            <a:ext cx="14511373" cy="571500"/>
           </a:xfrm>
           <a:prstGeom prst="rect">
             <a:avLst/>
@@ -8420,7 +8420,7 @@
         <p:spPr>
           <a:xfrm>
             <a:off x="1143000" y="5372100"/>
-            <a:ext cx="1133142" cy="571500"/>
+            <a:ext cx="1185827" cy="571500"/>
           </a:xfrm>
           <a:prstGeom prst="rect">
             <a:avLst/>
@@ -8450,7 +8450,7 @@
         <p:spPr>
           <a:xfrm>
             <a:off x="1143000" y="5372100"/>
-            <a:ext cx="1133142" cy="571500"/>
+            <a:ext cx="1185827" cy="571500"/>
           </a:xfrm>
           <a:prstGeom prst="rect">
             <a:avLst/>
@@ -8477,7 +8477,7 @@
                 <a:ea typeface="Pretendard"/>
                 <a:cs typeface="Pretendard"/>
               </a:rPr>
-              <a:t>robots</a:t>
+              <a:t>파일 저장</a:t>
             </a:r>
           </a:p>
         </p:txBody>
@@ -8490,8 +8490,8 @@
         </p:nvSpPr>
         <p:spPr>
           <a:xfrm>
-            <a:off x="2276142" y="5372100"/>
-            <a:ext cx="14868858" cy="571500"/>
+            <a:off x="2328827" y="5372100"/>
+            <a:ext cx="14816173" cy="571500"/>
           </a:xfrm>
           <a:prstGeom prst="rect">
             <a:avLst/>
@@ -8522,8 +8522,8 @@
         </p:nvSpPr>
         <p:spPr>
           <a:xfrm>
-            <a:off x="2428542" y="5372100"/>
-            <a:ext cx="14564058" cy="571500"/>
+            <a:off x="2481227" y="5372100"/>
+            <a:ext cx="14511373" cy="571500"/>
           </a:xfrm>
           <a:prstGeom prst="rect">
             <a:avLst/>
@@ -8550,7 +8550,7 @@
                 <a:ea typeface="Pretendard"/>
                 <a:cs typeface="Pretendard"/>
               </a:rPr>
-              <a:t>rp.can_fetch('*', URL) · rp.crawl_delay('*')</a:t>
+              <a:t>code 파일.py 또는 nano 파일.py → python3 파일.py</a:t>
             </a:r>
           </a:p>
         </p:txBody>
@@ -8728,7 +8728,7 @@
       <p:grpSpPr/>
       <p:sp>
         <p:nvSpPr>
-          <p:cNvPr id="2" name="Oval 1"/>
+          <p:cNvPr id="2" name="deckgen:decor"/>
           <p:cNvSpPr/>
           <p:nvPr/>
         </p:nvSpPr>
@@ -8758,7 +8758,7 @@
       </p:sp>
       <p:sp>
         <p:nvSpPr>
-          <p:cNvPr id="3" name="Oval 2"/>
+          <p:cNvPr id="3" name="deckgen:decor"/>
           <p:cNvSpPr/>
           <p:nvPr/>
         </p:nvSpPr>
@@ -8788,7 +8788,7 @@
       </p:sp>
       <p:sp>
         <p:nvSpPr>
-          <p:cNvPr id="4" name="Oval 3"/>
+          <p:cNvPr id="4" name="deckgen:decor"/>
           <p:cNvSpPr/>
           <p:nvPr/>
         </p:nvSpPr>
@@ -9755,7 +9755,7 @@
       <p:grpSpPr/>
       <p:sp>
         <p:nvSpPr>
-          <p:cNvPr id="2" name="Oval 1"/>
+          <p:cNvPr id="2" name="deckgen:decor"/>
           <p:cNvSpPr/>
           <p:nvPr/>
         </p:nvSpPr>
@@ -9785,7 +9785,7 @@
       </p:sp>
       <p:sp>
         <p:nvSpPr>
-          <p:cNvPr id="3" name="Oval 2"/>
+          <p:cNvPr id="3" name="deckgen:decor"/>
           <p:cNvSpPr/>
           <p:nvPr/>
         </p:nvSpPr>
@@ -9815,7 +9815,7 @@
       </p:sp>
       <p:sp>
         <p:nvSpPr>
-          <p:cNvPr id="4" name="Oval 3"/>
+          <p:cNvPr id="4" name="deckgen:decor"/>
           <p:cNvSpPr/>
           <p:nvPr/>
         </p:nvSpPr>
@@ -11361,7 +11361,7 @@
       <p:grpSpPr/>
       <p:sp>
         <p:nvSpPr>
-          <p:cNvPr id="2" name="Oval 1"/>
+          <p:cNvPr id="2" name="deckgen:decor"/>
           <p:cNvSpPr/>
           <p:nvPr/>
         </p:nvSpPr>
@@ -11391,7 +11391,7 @@
       </p:sp>
       <p:sp>
         <p:nvSpPr>
-          <p:cNvPr id="3" name="Oval 2"/>
+          <p:cNvPr id="3" name="deckgen:decor"/>
           <p:cNvSpPr/>
           <p:nvPr/>
         </p:nvSpPr>
@@ -11421,7 +11421,7 @@
       </p:sp>
       <p:sp>
         <p:nvSpPr>
-          <p:cNvPr id="4" name="Oval 3"/>
+          <p:cNvPr id="4" name="deckgen:decor"/>
           <p:cNvSpPr/>
           <p:nvPr/>
         </p:nvSpPr>
@@ -11597,7 +11597,7 @@
                 <a:ea typeface="Pretendard"/>
                 <a:cs typeface="Pretendard"/>
               </a:rPr>
-              <a:t>실무에서 크롤러가 깨지는 가장 흔한 이유가 사이트 구조 변경입니다</a:t>
+              <a:t>selector_test.py 는 터지는 것이 목적 — 방어 코드는 safe_pick.py 로 따로, 6단계는 next_page.py</a:t>
             </a:r>
           </a:p>
         </p:txBody>
@@ -12194,7 +12194,7 @@
                 <a:ea typeface="Pretendard"/>
                 <a:cs typeface="Pretendard"/>
               </a:rPr>
-              <a:t>pick() 방어</a:t>
+              <a:t>safe_pick.py</a:t>
             </a:r>
           </a:p>
         </p:txBody>
@@ -12235,7 +12235,7 @@
                 <a:ea typeface="Pretendard"/>
                 <a:cs typeface="Pretendard"/>
               </a:rPr>
-              <a:t>found 검사 후</a:t>
+              <a:t>새 파일 — found</a:t>
             </a:r>
           </a:p>
           <a:p>
@@ -12253,7 +12253,7 @@
                 <a:ea typeface="Pretendard"/>
                 <a:cs typeface="Pretendard"/>
               </a:rPr>
-              <a:t>없으면 (없음)</a:t>
+              <a:t>검사 후 (없음)</a:t>
             </a:r>
           </a:p>
         </p:txBody>
@@ -12390,7 +12390,7 @@
       <p:grpSpPr/>
       <p:sp>
         <p:nvSpPr>
-          <p:cNvPr id="2" name="Oval 1"/>
+          <p:cNvPr id="2" name="deckgen:decor"/>
           <p:cNvSpPr/>
           <p:nvPr/>
         </p:nvSpPr>
@@ -12420,7 +12420,7 @@
       </p:sp>
       <p:sp>
         <p:nvSpPr>
-          <p:cNvPr id="3" name="Oval 2"/>
+          <p:cNvPr id="3" name="deckgen:decor"/>
           <p:cNvSpPr/>
           <p:nvPr/>
         </p:nvSpPr>
@@ -12450,7 +12450,7 @@
       </p:sp>
       <p:sp>
         <p:nvSpPr>
-          <p:cNvPr id="4" name="Oval 3"/>
+          <p:cNvPr id="4" name="deckgen:decor"/>
           <p:cNvSpPr/>
           <p:nvPr/>
         </p:nvSpPr>
@@ -13451,7 +13451,7 @@
       <p:grpSpPr/>
       <p:sp>
         <p:nvSpPr>
-          <p:cNvPr id="2" name="Oval 1"/>
+          <p:cNvPr id="2" name="deckgen:decor"/>
           <p:cNvSpPr/>
           <p:nvPr/>
         </p:nvSpPr>
@@ -13481,7 +13481,7 @@
       </p:sp>
       <p:sp>
         <p:nvSpPr>
-          <p:cNvPr id="3" name="Oval 2"/>
+          <p:cNvPr id="3" name="deckgen:decor"/>
           <p:cNvSpPr/>
           <p:nvPr/>
         </p:nvSpPr>
@@ -13511,7 +13511,7 @@
       </p:sp>
       <p:sp>
         <p:nvSpPr>
-          <p:cNvPr id="4" name="Oval 3"/>
+          <p:cNvPr id="4" name="deckgen:decor"/>
           <p:cNvSpPr/>
           <p:nvPr/>
         </p:nvSpPr>
